--- a/docs/QNA-Auth-Presentation2.pptx
+++ b/docs/QNA-Auth-Presentation2.pptx
@@ -314,7 +314,7 @@
               <a:rPr lang="en-US"/>
               <a:t>1</a:t>
             </a:fld>
-            <a:endParaRPr lang="en-US"/>
+            <a:endParaRPr lang="en-US" dirty="0"/>
           </a:p>
         </p:txBody>
       </p:sp>
@@ -398,7 +398,7 @@
               <a:rPr lang="en-US"/>
               <a:t>10</a:t>
             </a:fld>
-            <a:endParaRPr lang="en-US"/>
+            <a:endParaRPr lang="en-US" dirty="0"/>
           </a:p>
         </p:txBody>
       </p:sp>
@@ -482,7 +482,7 @@
               <a:rPr lang="en-US"/>
               <a:t>11</a:t>
             </a:fld>
-            <a:endParaRPr lang="en-US"/>
+            <a:endParaRPr lang="en-US" dirty="0"/>
           </a:p>
         </p:txBody>
       </p:sp>
@@ -566,7 +566,7 @@
               <a:rPr lang="en-US"/>
               <a:t>2</a:t>
             </a:fld>
-            <a:endParaRPr lang="en-US"/>
+            <a:endParaRPr lang="en-US" dirty="0"/>
           </a:p>
         </p:txBody>
       </p:sp>
@@ -650,7 +650,7 @@
               <a:rPr lang="en-US"/>
               <a:t>3</a:t>
             </a:fld>
-            <a:endParaRPr lang="en-US"/>
+            <a:endParaRPr lang="en-US" dirty="0"/>
           </a:p>
         </p:txBody>
       </p:sp>
@@ -734,7 +734,7 @@
               <a:rPr lang="en-US"/>
               <a:t>4</a:t>
             </a:fld>
-            <a:endParaRPr lang="en-US"/>
+            <a:endParaRPr lang="en-US" dirty="0"/>
           </a:p>
         </p:txBody>
       </p:sp>
@@ -818,7 +818,7 @@
               <a:rPr lang="en-US"/>
               <a:t>5</a:t>
             </a:fld>
-            <a:endParaRPr lang="en-US"/>
+            <a:endParaRPr lang="en-US" dirty="0"/>
           </a:p>
         </p:txBody>
       </p:sp>
@@ -902,7 +902,7 @@
               <a:rPr lang="en-US"/>
               <a:t>6</a:t>
             </a:fld>
-            <a:endParaRPr lang="en-US"/>
+            <a:endParaRPr lang="en-US" dirty="0"/>
           </a:p>
         </p:txBody>
       </p:sp>
@@ -986,7 +986,7 @@
               <a:rPr lang="en-US"/>
               <a:t>7</a:t>
             </a:fld>
-            <a:endParaRPr lang="en-US"/>
+            <a:endParaRPr lang="en-US" dirty="0"/>
           </a:p>
         </p:txBody>
       </p:sp>
@@ -1070,7 +1070,7 @@
               <a:rPr lang="en-US"/>
               <a:t>8</a:t>
             </a:fld>
-            <a:endParaRPr lang="en-US"/>
+            <a:endParaRPr lang="en-US" dirty="0"/>
           </a:p>
         </p:txBody>
       </p:sp>
@@ -1154,7 +1154,7 @@
               <a:rPr lang="en-US"/>
               <a:t>9</a:t>
             </a:fld>
-            <a:endParaRPr lang="en-US"/>
+            <a:endParaRPr lang="en-US" dirty="0"/>
           </a:p>
         </p:txBody>
       </p:sp>
@@ -1523,7 +1523,7 @@
           <a:bodyPr/>
           <a:lstStyle/>
           <a:p>
-            <a:endParaRPr lang="en-IN"/>
+            <a:endParaRPr lang="en-IN" dirty="0"/>
           </a:p>
         </p:txBody>
       </p:sp>
@@ -1552,7 +1552,7 @@
           <a:bodyPr/>
           <a:lstStyle/>
           <a:p>
-            <a:endParaRPr lang="en-IN"/>
+            <a:endParaRPr lang="en-IN" dirty="0"/>
           </a:p>
         </p:txBody>
       </p:sp>
@@ -1721,7 +1721,7 @@
           <a:bodyPr/>
           <a:lstStyle/>
           <a:p>
-            <a:endParaRPr lang="en-IN"/>
+            <a:endParaRPr lang="en-IN" dirty="0"/>
           </a:p>
         </p:txBody>
       </p:sp>
@@ -1869,7 +1869,7 @@
           <a:bodyPr/>
           <a:lstStyle/>
           <a:p>
-            <a:endParaRPr lang="en-IN"/>
+            <a:endParaRPr lang="en-IN" dirty="0"/>
           </a:p>
         </p:txBody>
       </p:sp>
@@ -1944,7 +1944,7 @@
           <a:bodyPr/>
           <a:lstStyle/>
           <a:p>
-            <a:endParaRPr lang="en-IN"/>
+            <a:endParaRPr lang="en-IN" dirty="0"/>
           </a:p>
         </p:txBody>
       </p:sp>
@@ -2056,7 +2056,7 @@
           <a:bodyPr/>
           <a:lstStyle/>
           <a:p>
-            <a:endParaRPr lang="en-IN"/>
+            <a:endParaRPr lang="en-IN" dirty="0"/>
           </a:p>
         </p:txBody>
       </p:sp>
@@ -2083,7 +2083,7 @@
           <a:bodyPr/>
           <a:lstStyle/>
           <a:p>
-            <a:endParaRPr lang="en-IN"/>
+            <a:endParaRPr lang="en-IN" dirty="0"/>
           </a:p>
         </p:txBody>
       </p:sp>
@@ -2151,7 +2151,7 @@
           <a:bodyPr/>
           <a:lstStyle/>
           <a:p>
-            <a:endParaRPr lang="en-IN"/>
+            <a:endParaRPr lang="en-IN" dirty="0"/>
           </a:p>
         </p:txBody>
       </p:sp>
@@ -2219,7 +2219,7 @@
           <a:bodyPr/>
           <a:lstStyle/>
           <a:p>
-            <a:endParaRPr lang="en-IN"/>
+            <a:endParaRPr lang="en-IN" dirty="0"/>
           </a:p>
         </p:txBody>
       </p:sp>
@@ -2287,7 +2287,7 @@
           <a:bodyPr/>
           <a:lstStyle/>
           <a:p>
-            <a:endParaRPr lang="en-IN"/>
+            <a:endParaRPr lang="en-IN" dirty="0"/>
           </a:p>
         </p:txBody>
       </p:sp>
@@ -2355,7 +2355,7 @@
           <a:bodyPr/>
           <a:lstStyle/>
           <a:p>
-            <a:endParaRPr lang="en-IN"/>
+            <a:endParaRPr lang="en-IN" dirty="0"/>
           </a:p>
         </p:txBody>
       </p:sp>
@@ -2423,7 +2423,7 @@
           <a:bodyPr/>
           <a:lstStyle/>
           <a:p>
-            <a:endParaRPr lang="en-IN"/>
+            <a:endParaRPr lang="en-IN" dirty="0"/>
           </a:p>
         </p:txBody>
       </p:sp>
@@ -2491,7 +2491,7 @@
           <a:bodyPr/>
           <a:lstStyle/>
           <a:p>
-            <a:endParaRPr lang="en-IN"/>
+            <a:endParaRPr lang="en-IN" dirty="0"/>
           </a:p>
         </p:txBody>
       </p:sp>
@@ -2559,7 +2559,7 @@
           <a:bodyPr/>
           <a:lstStyle/>
           <a:p>
-            <a:endParaRPr lang="en-IN"/>
+            <a:endParaRPr lang="en-IN" dirty="0"/>
           </a:p>
         </p:txBody>
       </p:sp>
@@ -2627,7 +2627,7 @@
           <a:bodyPr/>
           <a:lstStyle/>
           <a:p>
-            <a:endParaRPr lang="en-IN"/>
+            <a:endParaRPr lang="en-IN" dirty="0"/>
           </a:p>
         </p:txBody>
       </p:sp>
@@ -2695,7 +2695,7 @@
           <a:bodyPr/>
           <a:lstStyle/>
           <a:p>
-            <a:endParaRPr lang="en-IN"/>
+            <a:endParaRPr lang="en-IN" dirty="0"/>
           </a:p>
         </p:txBody>
       </p:sp>
@@ -2763,7 +2763,7 @@
           <a:bodyPr/>
           <a:lstStyle/>
           <a:p>
-            <a:endParaRPr lang="en-IN"/>
+            <a:endParaRPr lang="en-IN" dirty="0"/>
           </a:p>
         </p:txBody>
       </p:sp>
@@ -2831,7 +2831,7 @@
           <a:bodyPr/>
           <a:lstStyle/>
           <a:p>
-            <a:endParaRPr lang="en-IN"/>
+            <a:endParaRPr lang="en-IN" dirty="0"/>
           </a:p>
         </p:txBody>
       </p:sp>
@@ -2899,7 +2899,7 @@
           <a:bodyPr/>
           <a:lstStyle/>
           <a:p>
-            <a:endParaRPr lang="en-IN"/>
+            <a:endParaRPr lang="en-IN" dirty="0"/>
           </a:p>
         </p:txBody>
       </p:sp>
@@ -2967,7 +2967,7 @@
           <a:bodyPr/>
           <a:lstStyle/>
           <a:p>
-            <a:endParaRPr lang="en-IN"/>
+            <a:endParaRPr lang="en-IN" dirty="0"/>
           </a:p>
         </p:txBody>
       </p:sp>
@@ -3035,7 +3035,7 @@
           <a:bodyPr/>
           <a:lstStyle/>
           <a:p>
-            <a:endParaRPr lang="en-IN"/>
+            <a:endParaRPr lang="en-IN" dirty="0"/>
           </a:p>
         </p:txBody>
       </p:sp>
@@ -3062,7 +3062,7 @@
           <a:bodyPr/>
           <a:lstStyle/>
           <a:p>
-            <a:endParaRPr lang="en-IN"/>
+            <a:endParaRPr lang="en-IN" dirty="0"/>
           </a:p>
         </p:txBody>
       </p:sp>
@@ -3130,7 +3130,7 @@
           <a:bodyPr/>
           <a:lstStyle/>
           <a:p>
-            <a:endParaRPr lang="en-IN"/>
+            <a:endParaRPr lang="en-IN" dirty="0"/>
           </a:p>
         </p:txBody>
       </p:sp>
@@ -3157,7 +3157,7 @@
           <a:bodyPr/>
           <a:lstStyle/>
           <a:p>
-            <a:endParaRPr lang="en-IN"/>
+            <a:endParaRPr lang="en-IN" dirty="0"/>
           </a:p>
         </p:txBody>
       </p:sp>
@@ -3225,7 +3225,7 @@
           <a:bodyPr/>
           <a:lstStyle/>
           <a:p>
-            <a:endParaRPr lang="en-IN"/>
+            <a:endParaRPr lang="en-IN" dirty="0"/>
           </a:p>
         </p:txBody>
       </p:sp>
@@ -3252,7 +3252,7 @@
           <a:bodyPr/>
           <a:lstStyle/>
           <a:p>
-            <a:endParaRPr lang="en-IN"/>
+            <a:endParaRPr lang="en-IN" dirty="0"/>
           </a:p>
         </p:txBody>
       </p:sp>
@@ -3320,7 +3320,7 @@
           <a:bodyPr/>
           <a:lstStyle/>
           <a:p>
-            <a:endParaRPr lang="en-IN"/>
+            <a:endParaRPr lang="en-IN" dirty="0"/>
           </a:p>
         </p:txBody>
       </p:sp>
@@ -3347,7 +3347,7 @@
           <a:bodyPr/>
           <a:lstStyle/>
           <a:p>
-            <a:endParaRPr lang="en-IN"/>
+            <a:endParaRPr lang="en-IN" dirty="0"/>
           </a:p>
         </p:txBody>
       </p:sp>
@@ -3415,7 +3415,7 @@
           <a:bodyPr/>
           <a:lstStyle/>
           <a:p>
-            <a:endParaRPr lang="en-IN"/>
+            <a:endParaRPr lang="en-IN" dirty="0"/>
           </a:p>
         </p:txBody>
       </p:sp>
@@ -3442,7 +3442,7 @@
           <a:bodyPr/>
           <a:lstStyle/>
           <a:p>
-            <a:endParaRPr lang="en-IN"/>
+            <a:endParaRPr lang="en-IN" dirty="0"/>
           </a:p>
         </p:txBody>
       </p:sp>
@@ -3510,7 +3510,7 @@
           <a:bodyPr/>
           <a:lstStyle/>
           <a:p>
-            <a:endParaRPr lang="en-IN"/>
+            <a:endParaRPr lang="en-IN" dirty="0"/>
           </a:p>
         </p:txBody>
       </p:sp>
@@ -3537,7 +3537,7 @@
           <a:bodyPr/>
           <a:lstStyle/>
           <a:p>
-            <a:endParaRPr lang="en-IN"/>
+            <a:endParaRPr lang="en-IN" dirty="0"/>
           </a:p>
         </p:txBody>
       </p:sp>
@@ -3605,7 +3605,7 @@
           <a:bodyPr/>
           <a:lstStyle/>
           <a:p>
-            <a:endParaRPr lang="en-IN"/>
+            <a:endParaRPr lang="en-IN" dirty="0"/>
           </a:p>
         </p:txBody>
       </p:sp>
@@ -3632,7 +3632,7 @@
           <a:bodyPr/>
           <a:lstStyle/>
           <a:p>
-            <a:endParaRPr lang="en-IN"/>
+            <a:endParaRPr lang="en-IN" dirty="0"/>
           </a:p>
         </p:txBody>
       </p:sp>
@@ -3700,7 +3700,7 @@
           <a:bodyPr/>
           <a:lstStyle/>
           <a:p>
-            <a:endParaRPr lang="en-IN"/>
+            <a:endParaRPr lang="en-IN" dirty="0"/>
           </a:p>
         </p:txBody>
       </p:sp>
@@ -3768,7 +3768,7 @@
           <a:bodyPr/>
           <a:lstStyle/>
           <a:p>
-            <a:endParaRPr lang="en-IN"/>
+            <a:endParaRPr lang="en-IN" dirty="0"/>
           </a:p>
         </p:txBody>
       </p:sp>
@@ -3836,7 +3836,7 @@
           <a:bodyPr/>
           <a:lstStyle/>
           <a:p>
-            <a:endParaRPr lang="en-IN"/>
+            <a:endParaRPr lang="en-IN" dirty="0"/>
           </a:p>
         </p:txBody>
       </p:sp>
@@ -3904,7 +3904,7 @@
           <a:bodyPr/>
           <a:lstStyle/>
           <a:p>
-            <a:endParaRPr lang="en-IN"/>
+            <a:endParaRPr lang="en-IN" dirty="0"/>
           </a:p>
         </p:txBody>
       </p:sp>
@@ -3972,7 +3972,7 @@
           <a:bodyPr/>
           <a:lstStyle/>
           <a:p>
-            <a:endParaRPr lang="en-IN"/>
+            <a:endParaRPr lang="en-IN" dirty="0"/>
           </a:p>
         </p:txBody>
       </p:sp>
@@ -4040,7 +4040,7 @@
           <a:bodyPr/>
           <a:lstStyle/>
           <a:p>
-            <a:endParaRPr lang="en-IN"/>
+            <a:endParaRPr lang="en-IN" dirty="0"/>
           </a:p>
         </p:txBody>
       </p:sp>
@@ -4108,7 +4108,7 @@
           <a:bodyPr/>
           <a:lstStyle/>
           <a:p>
-            <a:endParaRPr lang="en-IN"/>
+            <a:endParaRPr lang="en-IN" dirty="0"/>
           </a:p>
         </p:txBody>
       </p:sp>
@@ -4176,7 +4176,7 @@
           <a:bodyPr/>
           <a:lstStyle/>
           <a:p>
-            <a:endParaRPr lang="en-IN"/>
+            <a:endParaRPr lang="en-IN" dirty="0"/>
           </a:p>
         </p:txBody>
       </p:sp>
@@ -4203,7 +4203,7 @@
           <a:bodyPr/>
           <a:lstStyle/>
           <a:p>
-            <a:endParaRPr lang="en-IN"/>
+            <a:endParaRPr lang="en-IN" dirty="0"/>
           </a:p>
         </p:txBody>
       </p:sp>
@@ -4271,7 +4271,7 @@
           <a:bodyPr/>
           <a:lstStyle/>
           <a:p>
-            <a:endParaRPr lang="en-IN"/>
+            <a:endParaRPr lang="en-IN" dirty="0"/>
           </a:p>
         </p:txBody>
       </p:sp>
@@ -4298,7 +4298,7 @@
           <a:bodyPr/>
           <a:lstStyle/>
           <a:p>
-            <a:endParaRPr lang="en-IN"/>
+            <a:endParaRPr lang="en-IN" dirty="0"/>
           </a:p>
         </p:txBody>
       </p:sp>
@@ -4366,7 +4366,7 @@
           <a:bodyPr/>
           <a:lstStyle/>
           <a:p>
-            <a:endParaRPr lang="en-IN"/>
+            <a:endParaRPr lang="en-IN" dirty="0"/>
           </a:p>
         </p:txBody>
       </p:sp>
@@ -4393,7 +4393,7 @@
           <a:bodyPr/>
           <a:lstStyle/>
           <a:p>
-            <a:endParaRPr lang="en-IN"/>
+            <a:endParaRPr lang="en-IN" dirty="0"/>
           </a:p>
         </p:txBody>
       </p:sp>
@@ -4461,7 +4461,7 @@
           <a:bodyPr/>
           <a:lstStyle/>
           <a:p>
-            <a:endParaRPr lang="en-IN"/>
+            <a:endParaRPr lang="en-IN" dirty="0"/>
           </a:p>
         </p:txBody>
       </p:sp>
@@ -4488,7 +4488,7 @@
           <a:bodyPr/>
           <a:lstStyle/>
           <a:p>
-            <a:endParaRPr lang="en-IN"/>
+            <a:endParaRPr lang="en-IN" dirty="0"/>
           </a:p>
         </p:txBody>
       </p:sp>
@@ -4556,7 +4556,7 @@
           <a:bodyPr/>
           <a:lstStyle/>
           <a:p>
-            <a:endParaRPr lang="en-IN"/>
+            <a:endParaRPr lang="en-IN" dirty="0"/>
           </a:p>
         </p:txBody>
       </p:sp>
@@ -4583,7 +4583,7 @@
           <a:bodyPr/>
           <a:lstStyle/>
           <a:p>
-            <a:endParaRPr lang="en-IN"/>
+            <a:endParaRPr lang="en-IN" dirty="0"/>
           </a:p>
         </p:txBody>
       </p:sp>
@@ -4651,7 +4651,7 @@
           <a:bodyPr/>
           <a:lstStyle/>
           <a:p>
-            <a:endParaRPr lang="en-IN"/>
+            <a:endParaRPr lang="en-IN" dirty="0"/>
           </a:p>
         </p:txBody>
       </p:sp>
@@ -4678,7 +4678,7 @@
           <a:bodyPr/>
           <a:lstStyle/>
           <a:p>
-            <a:endParaRPr lang="en-IN"/>
+            <a:endParaRPr lang="en-IN" dirty="0"/>
           </a:p>
         </p:txBody>
       </p:sp>
@@ -4746,7 +4746,7 @@
           <a:bodyPr/>
           <a:lstStyle/>
           <a:p>
-            <a:endParaRPr lang="en-IN"/>
+            <a:endParaRPr lang="en-IN" dirty="0"/>
           </a:p>
         </p:txBody>
       </p:sp>
@@ -4773,7 +4773,7 @@
           <a:bodyPr/>
           <a:lstStyle/>
           <a:p>
-            <a:endParaRPr lang="en-IN"/>
+            <a:endParaRPr lang="en-IN" dirty="0"/>
           </a:p>
         </p:txBody>
       </p:sp>
@@ -4841,7 +4841,7 @@
           <a:bodyPr/>
           <a:lstStyle/>
           <a:p>
-            <a:endParaRPr lang="en-IN"/>
+            <a:endParaRPr lang="en-IN" dirty="0"/>
           </a:p>
         </p:txBody>
       </p:sp>
@@ -4909,7 +4909,7 @@
           <a:bodyPr/>
           <a:lstStyle/>
           <a:p>
-            <a:endParaRPr lang="en-IN"/>
+            <a:endParaRPr lang="en-IN" dirty="0"/>
           </a:p>
         </p:txBody>
       </p:sp>
@@ -4977,7 +4977,7 @@
           <a:bodyPr/>
           <a:lstStyle/>
           <a:p>
-            <a:endParaRPr lang="en-IN"/>
+            <a:endParaRPr lang="en-IN" dirty="0"/>
           </a:p>
         </p:txBody>
       </p:sp>
@@ -5045,7 +5045,7 @@
           <a:bodyPr/>
           <a:lstStyle/>
           <a:p>
-            <a:endParaRPr lang="en-IN"/>
+            <a:endParaRPr lang="en-IN" dirty="0"/>
           </a:p>
         </p:txBody>
       </p:sp>
@@ -5113,7 +5113,7 @@
           <a:bodyPr/>
           <a:lstStyle/>
           <a:p>
-            <a:endParaRPr lang="en-IN"/>
+            <a:endParaRPr lang="en-IN" dirty="0"/>
           </a:p>
         </p:txBody>
       </p:sp>
@@ -5181,7 +5181,7 @@
           <a:bodyPr/>
           <a:lstStyle/>
           <a:p>
-            <a:endParaRPr lang="en-IN"/>
+            <a:endParaRPr lang="en-IN" dirty="0"/>
           </a:p>
         </p:txBody>
       </p:sp>
@@ -5249,7 +5249,7 @@
           <a:bodyPr/>
           <a:lstStyle/>
           <a:p>
-            <a:endParaRPr lang="en-IN"/>
+            <a:endParaRPr lang="en-IN" dirty="0"/>
           </a:p>
         </p:txBody>
       </p:sp>
@@ -5317,7 +5317,7 @@
           <a:bodyPr/>
           <a:lstStyle/>
           <a:p>
-            <a:endParaRPr lang="en-IN"/>
+            <a:endParaRPr lang="en-IN" dirty="0"/>
           </a:p>
         </p:txBody>
       </p:sp>
@@ -5344,7 +5344,7 @@
           <a:bodyPr/>
           <a:lstStyle/>
           <a:p>
-            <a:endParaRPr lang="en-IN"/>
+            <a:endParaRPr lang="en-IN" dirty="0"/>
           </a:p>
         </p:txBody>
       </p:sp>
@@ -5412,7 +5412,7 @@
           <a:bodyPr/>
           <a:lstStyle/>
           <a:p>
-            <a:endParaRPr lang="en-IN"/>
+            <a:endParaRPr lang="en-IN" dirty="0"/>
           </a:p>
         </p:txBody>
       </p:sp>
@@ -5439,7 +5439,7 @@
           <a:bodyPr/>
           <a:lstStyle/>
           <a:p>
-            <a:endParaRPr lang="en-IN"/>
+            <a:endParaRPr lang="en-IN" dirty="0"/>
           </a:p>
         </p:txBody>
       </p:sp>
@@ -5507,7 +5507,7 @@
           <a:bodyPr/>
           <a:lstStyle/>
           <a:p>
-            <a:endParaRPr lang="en-IN"/>
+            <a:endParaRPr lang="en-IN" dirty="0"/>
           </a:p>
         </p:txBody>
       </p:sp>
@@ -5534,7 +5534,7 @@
           <a:bodyPr/>
           <a:lstStyle/>
           <a:p>
-            <a:endParaRPr lang="en-IN"/>
+            <a:endParaRPr lang="en-IN" dirty="0"/>
           </a:p>
         </p:txBody>
       </p:sp>
@@ -5602,7 +5602,7 @@
           <a:bodyPr/>
           <a:lstStyle/>
           <a:p>
-            <a:endParaRPr lang="en-IN"/>
+            <a:endParaRPr lang="en-IN" dirty="0"/>
           </a:p>
         </p:txBody>
       </p:sp>
@@ -5629,7 +5629,7 @@
           <a:bodyPr/>
           <a:lstStyle/>
           <a:p>
-            <a:endParaRPr lang="en-IN"/>
+            <a:endParaRPr lang="en-IN" dirty="0"/>
           </a:p>
         </p:txBody>
       </p:sp>
@@ -5697,7 +5697,7 @@
           <a:bodyPr/>
           <a:lstStyle/>
           <a:p>
-            <a:endParaRPr lang="en-IN"/>
+            <a:endParaRPr lang="en-IN" dirty="0"/>
           </a:p>
         </p:txBody>
       </p:sp>
@@ -5724,7 +5724,7 @@
           <a:bodyPr/>
           <a:lstStyle/>
           <a:p>
-            <a:endParaRPr lang="en-IN"/>
+            <a:endParaRPr lang="en-IN" dirty="0"/>
           </a:p>
         </p:txBody>
       </p:sp>
@@ -5792,7 +5792,7 @@
           <a:bodyPr/>
           <a:lstStyle/>
           <a:p>
-            <a:endParaRPr lang="en-IN"/>
+            <a:endParaRPr lang="en-IN" dirty="0"/>
           </a:p>
         </p:txBody>
       </p:sp>
@@ -5819,7 +5819,7 @@
           <a:bodyPr/>
           <a:lstStyle/>
           <a:p>
-            <a:endParaRPr lang="en-IN"/>
+            <a:endParaRPr lang="en-IN" dirty="0"/>
           </a:p>
         </p:txBody>
       </p:sp>
@@ -5887,7 +5887,7 @@
           <a:bodyPr/>
           <a:lstStyle/>
           <a:p>
-            <a:endParaRPr lang="en-IN"/>
+            <a:endParaRPr lang="en-IN" dirty="0"/>
           </a:p>
         </p:txBody>
       </p:sp>
@@ -5914,7 +5914,7 @@
           <a:bodyPr/>
           <a:lstStyle/>
           <a:p>
-            <a:endParaRPr lang="en-IN"/>
+            <a:endParaRPr lang="en-IN" dirty="0"/>
           </a:p>
         </p:txBody>
       </p:sp>
@@ -5982,7 +5982,7 @@
           <a:bodyPr/>
           <a:lstStyle/>
           <a:p>
-            <a:endParaRPr lang="en-IN"/>
+            <a:endParaRPr lang="en-IN" dirty="0"/>
           </a:p>
         </p:txBody>
       </p:sp>
@@ -6050,7 +6050,7 @@
           <a:bodyPr/>
           <a:lstStyle/>
           <a:p>
-            <a:endParaRPr lang="en-IN"/>
+            <a:endParaRPr lang="en-IN" dirty="0"/>
           </a:p>
         </p:txBody>
       </p:sp>
@@ -6118,7 +6118,7 @@
           <a:bodyPr/>
           <a:lstStyle/>
           <a:p>
-            <a:endParaRPr lang="en-IN"/>
+            <a:endParaRPr lang="en-IN" dirty="0"/>
           </a:p>
         </p:txBody>
       </p:sp>
@@ -6186,7 +6186,7 @@
           <a:bodyPr/>
           <a:lstStyle/>
           <a:p>
-            <a:endParaRPr lang="en-IN"/>
+            <a:endParaRPr lang="en-IN" dirty="0"/>
           </a:p>
         </p:txBody>
       </p:sp>
@@ -6254,7 +6254,7 @@
           <a:bodyPr/>
           <a:lstStyle/>
           <a:p>
-            <a:endParaRPr lang="en-IN"/>
+            <a:endParaRPr lang="en-IN" dirty="0"/>
           </a:p>
         </p:txBody>
       </p:sp>
@@ -6322,7 +6322,7 @@
           <a:bodyPr/>
           <a:lstStyle/>
           <a:p>
-            <a:endParaRPr lang="en-IN"/>
+            <a:endParaRPr lang="en-IN" dirty="0"/>
           </a:p>
         </p:txBody>
       </p:sp>
@@ -6390,7 +6390,7 @@
           <a:bodyPr/>
           <a:lstStyle/>
           <a:p>
-            <a:endParaRPr lang="en-IN"/>
+            <a:endParaRPr lang="en-IN" dirty="0"/>
           </a:p>
         </p:txBody>
       </p:sp>
@@ -6460,7 +6460,7 @@
           <a:bodyPr/>
           <a:lstStyle/>
           <a:p>
-            <a:endParaRPr lang="en-IN"/>
+            <a:endParaRPr lang="en-IN" dirty="0"/>
           </a:p>
         </p:txBody>
       </p:sp>
@@ -6556,7 +6556,7 @@
           <a:bodyPr/>
           <a:lstStyle/>
           <a:p>
-            <a:endParaRPr lang="en-IN"/>
+            <a:endParaRPr lang="en-IN" dirty="0"/>
           </a:p>
         </p:txBody>
       </p:sp>
@@ -6668,7 +6668,7 @@
           <a:bodyPr/>
           <a:lstStyle/>
           <a:p>
-            <a:endParaRPr lang="en-IN"/>
+            <a:endParaRPr lang="en-IN" dirty="0"/>
           </a:p>
         </p:txBody>
       </p:sp>
@@ -7294,7 +7294,7 @@
           <a:bodyPr/>
           <a:lstStyle/>
           <a:p>
-            <a:endParaRPr lang="en-IN"/>
+            <a:endParaRPr lang="en-IN" dirty="0"/>
           </a:p>
         </p:txBody>
       </p:sp>
@@ -7570,7 +7570,7 @@
           <a:bodyPr/>
           <a:lstStyle/>
           <a:p>
-            <a:endParaRPr lang="en-IN"/>
+            <a:endParaRPr lang="en-IN" dirty="0"/>
           </a:p>
         </p:txBody>
       </p:sp>
@@ -7686,7 +7686,7 @@
           <a:bodyPr/>
           <a:lstStyle/>
           <a:p>
-            <a:endParaRPr lang="en-IN"/>
+            <a:endParaRPr lang="en-IN" dirty="0"/>
           </a:p>
         </p:txBody>
       </p:sp>
@@ -7802,7 +7802,7 @@
           <a:bodyPr/>
           <a:lstStyle/>
           <a:p>
-            <a:endParaRPr lang="en-IN"/>
+            <a:endParaRPr lang="en-IN" dirty="0"/>
           </a:p>
         </p:txBody>
       </p:sp>
@@ -7936,7 +7936,7 @@
           <a:bodyPr/>
           <a:lstStyle/>
           <a:p>
-            <a:endParaRPr lang="en-IN"/>
+            <a:endParaRPr lang="en-IN" dirty="0"/>
           </a:p>
         </p:txBody>
       </p:sp>
@@ -8048,7 +8048,7 @@
           <a:bodyPr/>
           <a:lstStyle/>
           <a:p>
-            <a:endParaRPr lang="en-IN"/>
+            <a:endParaRPr lang="en-IN" dirty="0"/>
           </a:p>
         </p:txBody>
       </p:sp>
@@ -8286,7 +8286,7 @@
           <a:bodyPr/>
           <a:lstStyle/>
           <a:p>
-            <a:endParaRPr lang="en-IN"/>
+            <a:endParaRPr lang="en-IN" dirty="0"/>
           </a:p>
         </p:txBody>
       </p:sp>
@@ -8313,7 +8313,7 @@
           <a:bodyPr/>
           <a:lstStyle/>
           <a:p>
-            <a:endParaRPr lang="en-IN"/>
+            <a:endParaRPr lang="en-IN" dirty="0"/>
           </a:p>
         </p:txBody>
       </p:sp>
@@ -8427,7 +8427,7 @@
           <a:bodyPr/>
           <a:lstStyle/>
           <a:p>
-            <a:endParaRPr lang="en-IN"/>
+            <a:endParaRPr lang="en-IN" dirty="0"/>
           </a:p>
         </p:txBody>
       </p:sp>
@@ -8454,7 +8454,7 @@
           <a:bodyPr/>
           <a:lstStyle/>
           <a:p>
-            <a:endParaRPr lang="en-IN"/>
+            <a:endParaRPr lang="en-IN" dirty="0"/>
           </a:p>
         </p:txBody>
       </p:sp>
@@ -8591,7 +8591,7 @@
           <a:bodyPr/>
           <a:lstStyle/>
           <a:p>
-            <a:endParaRPr lang="en-IN"/>
+            <a:endParaRPr lang="en-IN" dirty="0"/>
           </a:p>
         </p:txBody>
       </p:sp>
@@ -8703,7 +8703,7 @@
           <a:bodyPr/>
           <a:lstStyle/>
           <a:p>
-            <a:endParaRPr lang="en-IN"/>
+            <a:endParaRPr lang="en-IN" dirty="0"/>
           </a:p>
         </p:txBody>
       </p:sp>
@@ -8736,7 +8736,7 @@
           <a:bodyPr/>
           <a:lstStyle/>
           <a:p>
-            <a:endParaRPr lang="en-IN"/>
+            <a:endParaRPr lang="en-IN" dirty="0"/>
           </a:p>
         </p:txBody>
       </p:sp>
@@ -8811,7 +8811,7 @@
           <a:bodyPr/>
           <a:lstStyle/>
           <a:p>
-            <a:endParaRPr lang="en-IN"/>
+            <a:endParaRPr lang="en-IN" dirty="0"/>
           </a:p>
         </p:txBody>
       </p:sp>
@@ -8923,7 +8923,7 @@
           <a:bodyPr/>
           <a:lstStyle/>
           <a:p>
-            <a:endParaRPr lang="en-IN"/>
+            <a:endParaRPr lang="en-IN" dirty="0"/>
           </a:p>
         </p:txBody>
       </p:sp>
@@ -8950,7 +8950,7 @@
           <a:bodyPr/>
           <a:lstStyle/>
           <a:p>
-            <a:endParaRPr lang="en-IN"/>
+            <a:endParaRPr lang="en-IN" dirty="0"/>
           </a:p>
         </p:txBody>
       </p:sp>
@@ -9018,7 +9018,7 @@
           <a:bodyPr/>
           <a:lstStyle/>
           <a:p>
-            <a:endParaRPr lang="en-IN"/>
+            <a:endParaRPr lang="en-IN" dirty="0"/>
           </a:p>
         </p:txBody>
       </p:sp>
@@ -9086,7 +9086,7 @@
           <a:bodyPr/>
           <a:lstStyle/>
           <a:p>
-            <a:endParaRPr lang="en-IN"/>
+            <a:endParaRPr lang="en-IN" dirty="0"/>
           </a:p>
         </p:txBody>
       </p:sp>
@@ -9154,7 +9154,7 @@
           <a:bodyPr/>
           <a:lstStyle/>
           <a:p>
-            <a:endParaRPr lang="en-IN"/>
+            <a:endParaRPr lang="en-IN" dirty="0"/>
           </a:p>
         </p:txBody>
       </p:sp>
@@ -9222,7 +9222,7 @@
           <a:bodyPr/>
           <a:lstStyle/>
           <a:p>
-            <a:endParaRPr lang="en-IN"/>
+            <a:endParaRPr lang="en-IN" dirty="0"/>
           </a:p>
         </p:txBody>
       </p:sp>
@@ -9249,7 +9249,7 @@
           <a:bodyPr/>
           <a:lstStyle/>
           <a:p>
-            <a:endParaRPr lang="en-IN"/>
+            <a:endParaRPr lang="en-IN" dirty="0"/>
           </a:p>
         </p:txBody>
       </p:sp>
@@ -9317,7 +9317,7 @@
           <a:bodyPr/>
           <a:lstStyle/>
           <a:p>
-            <a:endParaRPr lang="en-IN"/>
+            <a:endParaRPr lang="en-IN" dirty="0"/>
           </a:p>
         </p:txBody>
       </p:sp>
@@ -9344,7 +9344,7 @@
           <a:bodyPr/>
           <a:lstStyle/>
           <a:p>
-            <a:endParaRPr lang="en-IN"/>
+            <a:endParaRPr lang="en-IN" dirty="0"/>
           </a:p>
         </p:txBody>
       </p:sp>
@@ -9412,7 +9412,7 @@
           <a:bodyPr/>
           <a:lstStyle/>
           <a:p>
-            <a:endParaRPr lang="en-IN"/>
+            <a:endParaRPr lang="en-IN" dirty="0"/>
           </a:p>
         </p:txBody>
       </p:sp>
@@ -9480,7 +9480,7 @@
           <a:bodyPr/>
           <a:lstStyle/>
           <a:p>
-            <a:endParaRPr lang="en-IN"/>
+            <a:endParaRPr lang="en-IN" dirty="0"/>
           </a:p>
         </p:txBody>
       </p:sp>
@@ -9548,7 +9548,7 @@
           <a:bodyPr/>
           <a:lstStyle/>
           <a:p>
-            <a:endParaRPr lang="en-IN"/>
+            <a:endParaRPr lang="en-IN" dirty="0"/>
           </a:p>
         </p:txBody>
       </p:sp>
@@ -9575,7 +9575,7 @@
           <a:bodyPr/>
           <a:lstStyle/>
           <a:p>
-            <a:endParaRPr lang="en-IN"/>
+            <a:endParaRPr lang="en-IN" dirty="0"/>
           </a:p>
         </p:txBody>
       </p:sp>
@@ -9643,7 +9643,7 @@
           <a:bodyPr/>
           <a:lstStyle/>
           <a:p>
-            <a:endParaRPr lang="en-IN"/>
+            <a:endParaRPr lang="en-IN" dirty="0"/>
           </a:p>
         </p:txBody>
       </p:sp>
@@ -9670,7 +9670,7 @@
           <a:bodyPr/>
           <a:lstStyle/>
           <a:p>
-            <a:endParaRPr lang="en-IN"/>
+            <a:endParaRPr lang="en-IN" dirty="0"/>
           </a:p>
         </p:txBody>
       </p:sp>
@@ -9738,7 +9738,7 @@
           <a:bodyPr/>
           <a:lstStyle/>
           <a:p>
-            <a:endParaRPr lang="en-IN"/>
+            <a:endParaRPr lang="en-IN" dirty="0"/>
           </a:p>
         </p:txBody>
       </p:sp>
@@ -9806,7 +9806,7 @@
           <a:bodyPr/>
           <a:lstStyle/>
           <a:p>
-            <a:endParaRPr lang="en-IN"/>
+            <a:endParaRPr lang="en-IN" dirty="0"/>
           </a:p>
         </p:txBody>
       </p:sp>
@@ -9874,7 +9874,7 @@
           <a:bodyPr/>
           <a:lstStyle/>
           <a:p>
-            <a:endParaRPr lang="en-IN"/>
+            <a:endParaRPr lang="en-IN" dirty="0"/>
           </a:p>
         </p:txBody>
       </p:sp>
@@ -9901,7 +9901,7 @@
           <a:bodyPr/>
           <a:lstStyle/>
           <a:p>
-            <a:endParaRPr lang="en-IN"/>
+            <a:endParaRPr lang="en-IN" dirty="0"/>
           </a:p>
         </p:txBody>
       </p:sp>
@@ -9969,7 +9969,7 @@
           <a:bodyPr/>
           <a:lstStyle/>
           <a:p>
-            <a:endParaRPr lang="en-IN"/>
+            <a:endParaRPr lang="en-IN" dirty="0"/>
           </a:p>
         </p:txBody>
       </p:sp>
@@ -9996,7 +9996,7 @@
           <a:bodyPr/>
           <a:lstStyle/>
           <a:p>
-            <a:endParaRPr lang="en-IN"/>
+            <a:endParaRPr lang="en-IN" dirty="0"/>
           </a:p>
         </p:txBody>
       </p:sp>
@@ -10158,7 +10158,7 @@
           <a:bodyPr/>
           <a:lstStyle/>
           <a:p>
-            <a:endParaRPr lang="en-IN"/>
+            <a:endParaRPr lang="en-IN" dirty="0"/>
           </a:p>
         </p:txBody>
       </p:sp>
@@ -10233,7 +10233,7 @@
           <a:bodyPr/>
           <a:lstStyle/>
           <a:p>
-            <a:endParaRPr lang="en-IN"/>
+            <a:endParaRPr lang="en-IN" dirty="0"/>
           </a:p>
         </p:txBody>
       </p:sp>
@@ -10345,7 +10345,7 @@
           <a:bodyPr/>
           <a:lstStyle/>
           <a:p>
-            <a:endParaRPr lang="en-IN"/>
+            <a:endParaRPr lang="en-IN" dirty="0"/>
           </a:p>
         </p:txBody>
       </p:sp>
@@ -10376,7 +10376,7 @@
           <a:bodyPr/>
           <a:lstStyle/>
           <a:p>
-            <a:endParaRPr lang="en-IN"/>
+            <a:endParaRPr lang="en-IN" dirty="0"/>
           </a:p>
         </p:txBody>
       </p:sp>
@@ -10552,7 +10552,7 @@
           <a:bodyPr/>
           <a:lstStyle/>
           <a:p>
-            <a:endParaRPr lang="en-IN"/>
+            <a:endParaRPr lang="en-IN" dirty="0"/>
           </a:p>
         </p:txBody>
       </p:sp>
@@ -10728,7 +10728,7 @@
           <a:bodyPr/>
           <a:lstStyle/>
           <a:p>
-            <a:endParaRPr lang="en-IN"/>
+            <a:endParaRPr lang="en-IN" dirty="0"/>
           </a:p>
         </p:txBody>
       </p:sp>
@@ -10925,7 +10925,7 @@
           <a:bodyPr/>
           <a:lstStyle/>
           <a:p>
-            <a:endParaRPr lang="en-IN"/>
+            <a:endParaRPr lang="en-IN" dirty="0"/>
           </a:p>
         </p:txBody>
       </p:sp>
@@ -11037,7 +11037,7 @@
           <a:bodyPr/>
           <a:lstStyle/>
           <a:p>
-            <a:endParaRPr lang="en-IN"/>
+            <a:endParaRPr lang="en-IN" dirty="0"/>
           </a:p>
         </p:txBody>
       </p:sp>
@@ -11064,7 +11064,7 @@
           <a:bodyPr/>
           <a:lstStyle/>
           <a:p>
-            <a:endParaRPr lang="en-IN"/>
+            <a:endParaRPr lang="en-IN" dirty="0"/>
           </a:p>
         </p:txBody>
       </p:sp>
@@ -11132,7 +11132,7 @@
           <a:bodyPr/>
           <a:lstStyle/>
           <a:p>
-            <a:endParaRPr lang="en-IN"/>
+            <a:endParaRPr lang="en-IN" dirty="0"/>
           </a:p>
         </p:txBody>
       </p:sp>
@@ -11200,7 +11200,7 @@
           <a:bodyPr/>
           <a:lstStyle/>
           <a:p>
-            <a:endParaRPr lang="en-IN"/>
+            <a:endParaRPr lang="en-IN" dirty="0"/>
           </a:p>
         </p:txBody>
       </p:sp>
@@ -11268,7 +11268,7 @@
           <a:bodyPr/>
           <a:lstStyle/>
           <a:p>
-            <a:endParaRPr lang="en-IN"/>
+            <a:endParaRPr lang="en-IN" dirty="0"/>
           </a:p>
         </p:txBody>
       </p:sp>
@@ -11336,7 +11336,7 @@
           <a:bodyPr/>
           <a:lstStyle/>
           <a:p>
-            <a:endParaRPr lang="en-IN"/>
+            <a:endParaRPr lang="en-IN" dirty="0"/>
           </a:p>
         </p:txBody>
       </p:sp>
@@ -11404,7 +11404,7 @@
           <a:bodyPr/>
           <a:lstStyle/>
           <a:p>
-            <a:endParaRPr lang="en-IN"/>
+            <a:endParaRPr lang="en-IN" dirty="0"/>
           </a:p>
         </p:txBody>
       </p:sp>
@@ -11472,7 +11472,7 @@
           <a:bodyPr/>
           <a:lstStyle/>
           <a:p>
-            <a:endParaRPr lang="en-IN"/>
+            <a:endParaRPr lang="en-IN" dirty="0"/>
           </a:p>
         </p:txBody>
       </p:sp>
@@ -11540,7 +11540,7 @@
           <a:bodyPr/>
           <a:lstStyle/>
           <a:p>
-            <a:endParaRPr lang="en-IN"/>
+            <a:endParaRPr lang="en-IN" dirty="0"/>
           </a:p>
         </p:txBody>
       </p:sp>
@@ -11608,7 +11608,7 @@
           <a:bodyPr/>
           <a:lstStyle/>
           <a:p>
-            <a:endParaRPr lang="en-IN"/>
+            <a:endParaRPr lang="en-IN" dirty="0"/>
           </a:p>
         </p:txBody>
       </p:sp>
@@ -11676,7 +11676,7 @@
           <a:bodyPr/>
           <a:lstStyle/>
           <a:p>
-            <a:endParaRPr lang="en-IN"/>
+            <a:endParaRPr lang="en-IN" dirty="0"/>
           </a:p>
         </p:txBody>
       </p:sp>
@@ -11744,7 +11744,7 @@
           <a:bodyPr/>
           <a:lstStyle/>
           <a:p>
-            <a:endParaRPr lang="en-IN"/>
+            <a:endParaRPr lang="en-IN" dirty="0"/>
           </a:p>
         </p:txBody>
       </p:sp>
@@ -11812,7 +11812,7 @@
           <a:bodyPr/>
           <a:lstStyle/>
           <a:p>
-            <a:endParaRPr lang="en-IN"/>
+            <a:endParaRPr lang="en-IN" dirty="0"/>
           </a:p>
         </p:txBody>
       </p:sp>
@@ -11880,7 +11880,7 @@
           <a:bodyPr/>
           <a:lstStyle/>
           <a:p>
-            <a:endParaRPr lang="en-IN"/>
+            <a:endParaRPr lang="en-IN" dirty="0"/>
           </a:p>
         </p:txBody>
       </p:sp>
@@ -11907,7 +11907,7 @@
           <a:bodyPr/>
           <a:lstStyle/>
           <a:p>
-            <a:endParaRPr lang="en-IN"/>
+            <a:endParaRPr lang="en-IN" dirty="0"/>
           </a:p>
         </p:txBody>
       </p:sp>
@@ -11975,7 +11975,7 @@
           <a:bodyPr/>
           <a:lstStyle/>
           <a:p>
-            <a:endParaRPr lang="en-IN"/>
+            <a:endParaRPr lang="en-IN" dirty="0"/>
           </a:p>
         </p:txBody>
       </p:sp>
@@ -12002,7 +12002,7 @@
           <a:bodyPr/>
           <a:lstStyle/>
           <a:p>
-            <a:endParaRPr lang="en-IN"/>
+            <a:endParaRPr lang="en-IN" dirty="0"/>
           </a:p>
         </p:txBody>
       </p:sp>
@@ -12070,7 +12070,7 @@
           <a:bodyPr/>
           <a:lstStyle/>
           <a:p>
-            <a:endParaRPr lang="en-IN"/>
+            <a:endParaRPr lang="en-IN" dirty="0"/>
           </a:p>
         </p:txBody>
       </p:sp>
@@ -12097,7 +12097,7 @@
           <a:bodyPr/>
           <a:lstStyle/>
           <a:p>
-            <a:endParaRPr lang="en-IN"/>
+            <a:endParaRPr lang="en-IN" dirty="0"/>
           </a:p>
         </p:txBody>
       </p:sp>
@@ -12165,7 +12165,7 @@
           <a:bodyPr/>
           <a:lstStyle/>
           <a:p>
-            <a:endParaRPr lang="en-IN"/>
+            <a:endParaRPr lang="en-IN" dirty="0"/>
           </a:p>
         </p:txBody>
       </p:sp>
@@ -12192,7 +12192,7 @@
           <a:bodyPr/>
           <a:lstStyle/>
           <a:p>
-            <a:endParaRPr lang="en-IN"/>
+            <a:endParaRPr lang="en-IN" dirty="0"/>
           </a:p>
         </p:txBody>
       </p:sp>
@@ -12260,7 +12260,7 @@
           <a:bodyPr/>
           <a:lstStyle/>
           <a:p>
-            <a:endParaRPr lang="en-IN"/>
+            <a:endParaRPr lang="en-IN" dirty="0"/>
           </a:p>
         </p:txBody>
       </p:sp>
@@ -12287,7 +12287,7 @@
           <a:bodyPr/>
           <a:lstStyle/>
           <a:p>
-            <a:endParaRPr lang="en-IN"/>
+            <a:endParaRPr lang="en-IN" dirty="0"/>
           </a:p>
         </p:txBody>
       </p:sp>
@@ -12355,7 +12355,7 @@
           <a:bodyPr/>
           <a:lstStyle/>
           <a:p>
-            <a:endParaRPr lang="en-IN"/>
+            <a:endParaRPr lang="en-IN" dirty="0"/>
           </a:p>
         </p:txBody>
       </p:sp>
@@ -12382,7 +12382,7 @@
           <a:bodyPr/>
           <a:lstStyle/>
           <a:p>
-            <a:endParaRPr lang="en-IN"/>
+            <a:endParaRPr lang="en-IN" dirty="0"/>
           </a:p>
         </p:txBody>
       </p:sp>
@@ -12450,7 +12450,7 @@
           <a:bodyPr/>
           <a:lstStyle/>
           <a:p>
-            <a:endParaRPr lang="en-IN"/>
+            <a:endParaRPr lang="en-IN" dirty="0"/>
           </a:p>
         </p:txBody>
       </p:sp>
@@ -12518,7 +12518,7 @@
           <a:bodyPr/>
           <a:lstStyle/>
           <a:p>
-            <a:endParaRPr lang="en-IN"/>
+            <a:endParaRPr lang="en-IN" dirty="0"/>
           </a:p>
         </p:txBody>
       </p:sp>
@@ -12586,7 +12586,7 @@
           <a:bodyPr/>
           <a:lstStyle/>
           <a:p>
-            <a:endParaRPr lang="en-IN"/>
+            <a:endParaRPr lang="en-IN" dirty="0"/>
           </a:p>
         </p:txBody>
       </p:sp>
@@ -12654,7 +12654,7 @@
           <a:bodyPr/>
           <a:lstStyle/>
           <a:p>
-            <a:endParaRPr lang="en-IN"/>
+            <a:endParaRPr lang="en-IN" dirty="0"/>
           </a:p>
         </p:txBody>
       </p:sp>
@@ -12722,7 +12722,7 @@
           <a:bodyPr/>
           <a:lstStyle/>
           <a:p>
-            <a:endParaRPr lang="en-IN"/>
+            <a:endParaRPr lang="en-IN" dirty="0"/>
           </a:p>
         </p:txBody>
       </p:sp>
@@ -12790,7 +12790,7 @@
           <a:bodyPr/>
           <a:lstStyle/>
           <a:p>
-            <a:endParaRPr lang="en-IN"/>
+            <a:endParaRPr lang="en-IN" dirty="0"/>
           </a:p>
         </p:txBody>
       </p:sp>
@@ -12860,7 +12860,7 @@
           <a:bodyPr/>
           <a:lstStyle/>
           <a:p>
-            <a:endParaRPr lang="en-IN"/>
+            <a:endParaRPr lang="en-IN" dirty="0"/>
           </a:p>
         </p:txBody>
       </p:sp>
@@ -12951,7 +12951,7 @@
           <a:bodyPr/>
           <a:lstStyle/>
           <a:p>
-            <a:endParaRPr lang="en-IN"/>
+            <a:endParaRPr lang="en-IN" dirty="0"/>
           </a:p>
         </p:txBody>
       </p:sp>
@@ -13026,7 +13026,7 @@
           <a:bodyPr/>
           <a:lstStyle/>
           <a:p>
-            <a:endParaRPr lang="en-IN"/>
+            <a:endParaRPr lang="en-IN" dirty="0"/>
           </a:p>
         </p:txBody>
       </p:sp>
@@ -13138,7 +13138,7 @@
           <a:bodyPr/>
           <a:lstStyle/>
           <a:p>
-            <a:endParaRPr lang="en-IN"/>
+            <a:endParaRPr lang="en-IN" dirty="0"/>
           </a:p>
         </p:txBody>
       </p:sp>
@@ -13411,7 +13411,7 @@
           <a:bodyPr/>
           <a:lstStyle/>
           <a:p>
-            <a:endParaRPr lang="en-IN"/>
+            <a:endParaRPr lang="en-IN" dirty="0"/>
           </a:p>
         </p:txBody>
       </p:sp>
@@ -13565,7 +13565,7 @@
           <a:bodyPr/>
           <a:lstStyle/>
           <a:p>
-            <a:endParaRPr lang="en-IN"/>
+            <a:endParaRPr lang="en-IN" dirty="0"/>
           </a:p>
         </p:txBody>
       </p:sp>
@@ -13592,7 +13592,7 @@
           <a:bodyPr/>
           <a:lstStyle/>
           <a:p>
-            <a:endParaRPr lang="en-IN"/>
+            <a:endParaRPr lang="en-IN" dirty="0"/>
           </a:p>
         </p:txBody>
       </p:sp>
@@ -13688,7 +13688,7 @@
           <a:bodyPr/>
           <a:lstStyle/>
           <a:p>
-            <a:endParaRPr lang="en-IN"/>
+            <a:endParaRPr lang="en-IN" dirty="0"/>
           </a:p>
         </p:txBody>
       </p:sp>
@@ -13800,7 +13800,7 @@
           <a:bodyPr/>
           <a:lstStyle/>
           <a:p>
-            <a:endParaRPr lang="en-IN"/>
+            <a:endParaRPr lang="en-IN" dirty="0"/>
           </a:p>
         </p:txBody>
       </p:sp>
@@ -13829,7 +13829,7 @@
           <a:bodyPr/>
           <a:lstStyle/>
           <a:p>
-            <a:endParaRPr lang="en-IN"/>
+            <a:endParaRPr lang="en-IN" dirty="0"/>
           </a:p>
         </p:txBody>
       </p:sp>
@@ -13856,7 +13856,7 @@
           <a:bodyPr/>
           <a:lstStyle/>
           <a:p>
-            <a:endParaRPr lang="en-IN"/>
+            <a:endParaRPr lang="en-IN" dirty="0"/>
           </a:p>
         </p:txBody>
       </p:sp>
@@ -14011,7 +14011,7 @@
           <a:bodyPr/>
           <a:lstStyle/>
           <a:p>
-            <a:endParaRPr lang="en-IN"/>
+            <a:endParaRPr lang="en-IN" dirty="0"/>
           </a:p>
         </p:txBody>
       </p:sp>
@@ -14038,7 +14038,7 @@
           <a:bodyPr/>
           <a:lstStyle/>
           <a:p>
-            <a:endParaRPr lang="en-IN"/>
+            <a:endParaRPr lang="en-IN" dirty="0"/>
           </a:p>
         </p:txBody>
       </p:sp>
@@ -14193,7 +14193,7 @@
           <a:bodyPr/>
           <a:lstStyle/>
           <a:p>
-            <a:endParaRPr lang="en-IN"/>
+            <a:endParaRPr lang="en-IN" dirty="0"/>
           </a:p>
         </p:txBody>
       </p:sp>
@@ -14220,7 +14220,7 @@
           <a:bodyPr/>
           <a:lstStyle/>
           <a:p>
-            <a:endParaRPr lang="en-IN"/>
+            <a:endParaRPr lang="en-IN" dirty="0"/>
           </a:p>
         </p:txBody>
       </p:sp>
@@ -14375,7 +14375,7 @@
           <a:bodyPr/>
           <a:lstStyle/>
           <a:p>
-            <a:endParaRPr lang="en-IN"/>
+            <a:endParaRPr lang="en-IN" dirty="0"/>
           </a:p>
         </p:txBody>
       </p:sp>
@@ -14402,7 +14402,7 @@
           <a:bodyPr/>
           <a:lstStyle/>
           <a:p>
-            <a:endParaRPr lang="en-IN"/>
+            <a:endParaRPr lang="en-IN" dirty="0"/>
           </a:p>
         </p:txBody>
       </p:sp>
@@ -14557,7 +14557,7 @@
           <a:bodyPr/>
           <a:lstStyle/>
           <a:p>
-            <a:endParaRPr lang="en-IN"/>
+            <a:endParaRPr lang="en-IN" dirty="0"/>
           </a:p>
         </p:txBody>
       </p:sp>
@@ -14584,7 +14584,7 @@
           <a:bodyPr/>
           <a:lstStyle/>
           <a:p>
-            <a:endParaRPr lang="en-IN"/>
+            <a:endParaRPr lang="en-IN" dirty="0"/>
           </a:p>
         </p:txBody>
       </p:sp>
@@ -14739,7 +14739,7 @@
           <a:bodyPr/>
           <a:lstStyle/>
           <a:p>
-            <a:endParaRPr lang="en-IN"/>
+            <a:endParaRPr lang="en-IN" dirty="0"/>
           </a:p>
         </p:txBody>
       </p:sp>
@@ -14766,7 +14766,7 @@
           <a:bodyPr/>
           <a:lstStyle/>
           <a:p>
-            <a:endParaRPr lang="en-IN"/>
+            <a:endParaRPr lang="en-IN" dirty="0"/>
           </a:p>
         </p:txBody>
       </p:sp>
